--- a/Trabajo3_Botilleria_GrupoVerde.pptx
+++ b/Trabajo3_Botilleria_GrupoVerde.pptx
@@ -1220,7 +1220,7 @@
                           </a:solidFill>
                           <a:latin typeface="Aptos"/>
                         </a:rPr>
-                        <a:t>Arriagada · Faúndez · Uribe · Alfaro · Hernández · Riquelme · Alarcón · Pozo</a:t>
+                        <a:t>Arriagada · Faúndez · Uribe · Alfaro · Hernández · Riquelme · Alarcón</a:t>
                       </a:r>
                     </a:p>
                   </a:txBody>
@@ -1419,7 +1419,7 @@
                 <a:latin typeface="Arial"/>
                 <a:cs typeface="Arial"/>
               </a:rPr>
-              <a:t>Jeremy Hernández  ·  Vicente Riquelme  ·  José Alarcón  ·  Bastián Pozo (ex director)</a:t>
+              <a:t>Jeremy Hernández  ·  Vicente Riquelme  ·  José Alarcón</a:t>
             </a:r>
           </a:p>
         </p:txBody>
@@ -1545,7 +1545,7 @@
                           </a:solidFill>
                           <a:latin typeface="Aptos"/>
                         </a:rPr>
-                        <a:t>Arriagada · Faúndez · Uribe · Alfaro · Hernández · Riquelme · Alarcón · Pozo</a:t>
+                        <a:t>Arriagada · Faúndez · Uribe · Alfaro · Hernández · Riquelme · Alarcón</a:t>
                       </a:r>
                     </a:p>
                   </a:txBody>
@@ -2579,7 +2579,7 @@
                           </a:solidFill>
                           <a:latin typeface="Aptos"/>
                         </a:rPr>
-                        <a:t>Arriagada · Faúndez · Uribe · Alfaro · Hernández · Riquelme · Alarcón · Pozo</a:t>
+                        <a:t>Arriagada · Faúndez · Uribe · Alfaro · Hernández · Riquelme · Alarcón</a:t>
                       </a:r>
                     </a:p>
                   </a:txBody>
@@ -2721,7 +2721,7 @@
                 <a:latin typeface="Arial"/>
                 <a:cs typeface="Arial"/>
               </a:rPr>
-              <a:t>Error detectado: el cambio de liderazgo afectó la continuidad. → Se abordó con traspaso documentado del director inicial y roles claros.</a:t>
+              <a:t>Error detectado: el cambio de liderazgo afectó la continuidad. → Se abordó con traspaso documentado en cada cambio de dirección y roles claros.</a:t>
             </a:r>
           </a:p>
           <a:p>
@@ -2960,7 +2960,7 @@
                           </a:solidFill>
                           <a:latin typeface="Aptos"/>
                         </a:rPr>
-                        <a:t>Arriagada · Faúndez · Uribe · Alfaro · Hernández · Riquelme · Alarcón · Pozo</a:t>
+                        <a:t>Arriagada · Faúndez · Uribe · Alfaro · Hernández · Riquelme · Alarcón</a:t>
                       </a:r>
                     </a:p>
                   </a:txBody>
@@ -3323,7 +3323,7 @@
                           </a:solidFill>
                           <a:latin typeface="Aptos"/>
                         </a:rPr>
-                        <a:t>Arriagada · Faúndez · Uribe · Alfaro · Hernández · Riquelme · Alarcón · Pozo</a:t>
+                        <a:t>Arriagada · Faúndez · Uribe · Alfaro · Hernández · Riquelme · Alarcón</a:t>
                       </a:r>
                     </a:p>
                   </a:txBody>
@@ -4669,7 +4669,7 @@
                           </a:solidFill>
                           <a:latin typeface="Aptos"/>
                         </a:rPr>
-                        <a:t>Arriagada · Faúndez · Uribe · Alfaro · Hernández · Riquelme · Alarcón · Pozo</a:t>
+                        <a:t>Arriagada · Faúndez · Uribe · Alfaro · Hernández · Riquelme · Alarcón</a:t>
                       </a:r>
                     </a:p>
                   </a:txBody>
@@ -5512,7 +5512,7 @@
                           </a:solidFill>
                           <a:latin typeface="Aptos"/>
                         </a:rPr>
-                        <a:t>Arriagada · Faúndez · Uribe · Alfaro · Hernández · Riquelme · Alarcón · Pozo</a:t>
+                        <a:t>Arriagada · Faúndez · Uribe · Alfaro · Hernández · Riquelme · Alarcón</a:t>
                       </a:r>
                     </a:p>
                   </a:txBody>
@@ -6699,7 +6699,7 @@
                           </a:solidFill>
                           <a:latin typeface="Aptos"/>
                         </a:rPr>
-                        <a:t>Arriagada · Faúndez · Uribe · Alfaro · Hernández · Riquelme · Alarcón · Pozo</a:t>
+                        <a:t>Arriagada · Faúndez · Uribe · Alfaro · Hernández · Riquelme · Alarcón</a:t>
                       </a:r>
                     </a:p>
                   </a:txBody>
@@ -7504,7 +7504,7 @@
                           </a:solidFill>
                           <a:latin typeface="Aptos"/>
                         </a:rPr>
-                        <a:t>Arriagada · Faúndez · Uribe · Alfaro · Hernández · Riquelme · Alarcón · Pozo</a:t>
+                        <a:t>Arriagada · Faúndez · Uribe · Alfaro · Hernández · Riquelme · Alarcón</a:t>
                       </a:r>
                     </a:p>
                   </a:txBody>
@@ -8200,7 +8200,7 @@
                           </a:solidFill>
                           <a:latin typeface="Aptos"/>
                         </a:rPr>
-                        <a:t>Arriagada · Faúndez · Uribe · Alfaro · Hernández · Riquelme · Alarcón · Pozo</a:t>
+                        <a:t>Arriagada · Faúndez · Uribe · Alfaro · Hernández · Riquelme · Alarcón</a:t>
                       </a:r>
                     </a:p>
                   </a:txBody>
@@ -8916,7 +8916,7 @@
                           </a:solidFill>
                           <a:latin typeface="Aptos"/>
                         </a:rPr>
-                        <a:t>Arriagada · Faúndez · Uribe · Alfaro · Hernández · Riquelme · Alarcón · Pozo</a:t>
+                        <a:t>Arriagada · Faúndez · Uribe · Alfaro · Hernández · Riquelme · Alarcón</a:t>
                       </a:r>
                     </a:p>
                   </a:txBody>
@@ -9375,7 +9375,7 @@
                           </a:solidFill>
                           <a:latin typeface="Aptos"/>
                         </a:rPr>
-                        <a:t>Arriagada · Faúndez · Uribe · Alfaro · Hernández · Riquelme · Alarcón · Pozo</a:t>
+                        <a:t>Arriagada · Faúndez · Uribe · Alfaro · Hernández · Riquelme · Alarcón</a:t>
                       </a:r>
                     </a:p>
                   </a:txBody>
@@ -9516,7 +9516,7 @@
                 <a:latin typeface="Arial"/>
                 <a:cs typeface="Arial"/>
               </a:rPr>
-              <a:t>El liderazgo del proyecto cambió durante su desarrollo. Director actual: Matías Arriagada; Bastián Pozo (director inicial) actúa como apoyo y traspaso de contexto.</a:t>
+              <a:t>El liderazgo del proyecto cambió dos veces durante su desarrollo; los directores anteriores ya no están en el equipo. Director actual: Matías Arriagada.</a:t>
             </a:r>
           </a:p>
           <a:p>
@@ -9609,7 +9609,7 @@
                 <a:latin typeface="Arial"/>
                 <a:cs typeface="Arial"/>
               </a:rPr>
-              <a:t>Traspaso de contexto del ex director, apoyo cruzado entre integrantes y lector en préstamo para no detener las pruebas.</a:t>
+              <a:t>Traspaso de contexto en cada cambio de dirección, apoyo cruzado entre integrantes y lector en préstamo para no detener las pruebas.</a:t>
             </a:r>
           </a:p>
         </p:txBody>
